--- a/examples/harness_research_overview.pptx
+++ b/examples/harness_research_overview.pptx
@@ -5859,7 +5859,7 @@
                     <a:lstStyle/>
                     <a:p>
                       <a:r>
-                        <a:t>0.89</a:t>
+                        <a:t>0.91</a:t>
                       </a:r>
                     </a:p>
                   </a:txBody>
